--- a/curso/pptx/S02.pptx
+++ b/curso/pptx/S02.pptx
@@ -4597,7 +4597,7 @@
                 </a:solidFill>
                 <a:latin typeface="Nunito Sans"/>
               </a:rPr>
-              <a:t>凯文（Kevin）说：“毕尔巴鄂竞技队在阿诺埃塔球场踢球。”</a:t>
+              <a:t>一个男孩说：“毕尔巴鄂竞技队在阿诺埃塔球场踢球。”</a:t>
             </a:r>
           </a:p>
         </p:txBody>
